--- a/3342ИвановДМЛаб1.pptx
+++ b/3342ИвановДМЛаб1.pptx
@@ -4483,18 +4483,31 @@
         </p:nvSpPr>
         <p:spPr>
           <a:xfrm>
-            <a:off x="1921079" y="4455563"/>
-            <a:ext cx="8349842" cy="810164"/>
+            <a:off x="1921079" y="3573710"/>
+            <a:ext cx="8349842" cy="2143855"/>
           </a:xfrm>
         </p:spPr>
         <p:txBody>
-          <a:bodyPr/>
+          <a:bodyPr anchor="ctr">
+            <a:noAutofit/>
+          </a:bodyPr>
           <a:lstStyle/>
           <a:p>
             <a:pPr algn="l"/>
             <a:r>
               <a:rPr lang="ru-RU" dirty="0"/>
-              <a:t>Студент: _______________ Иванов Данила , группа 3342 Руководитель:___________ Племянников А.К., доцент каф. ИБ</a:t>
+              <a:t>Студент: _______________ Иванов Данила , группа 3342 </a:t>
+            </a:r>
+          </a:p>
+          <a:p>
+            <a:pPr algn="l">
+              <a:lnSpc>
+                <a:spcPct val="250000"/>
+              </a:lnSpc>
+            </a:pPr>
+            <a:r>
+              <a:rPr lang="ru-RU" dirty="0"/>
+              <a:t>Руководитель:___________ Племянников А.К., доцент каф. ИБ</a:t>
             </a:r>
           </a:p>
         </p:txBody>
@@ -5429,10 +5442,10 @@
       </p:sp>
       <p:pic>
         <p:nvPicPr>
-          <p:cNvPr id="4" name="Рисунок 3">
-            <a:extLst>
-              <a:ext uri="{FF2B5EF4-FFF2-40B4-BE49-F238E27FC236}">
-                <a16:creationId xmlns:a16="http://schemas.microsoft.com/office/drawing/2014/main" id="{0B0C5B38-3BC6-417C-B708-559AF9485EFF}"/>
+          <p:cNvPr id="3" name="Рисунок 2">
+            <a:extLst>
+              <a:ext uri="{FF2B5EF4-FFF2-40B4-BE49-F238E27FC236}">
+                <a16:creationId xmlns:a16="http://schemas.microsoft.com/office/drawing/2014/main" id="{2A765203-45CC-4175-B452-4766A37CF7AB}"/>
               </a:ext>
             </a:extLst>
           </p:cNvPr>
@@ -5449,8 +5462,8 @@
         </p:blipFill>
         <p:spPr>
           <a:xfrm>
-            <a:off x="6419970" y="1182846"/>
-            <a:ext cx="3863881" cy="5423483"/>
+            <a:off x="5964585" y="1132513"/>
+            <a:ext cx="3187803" cy="5632030"/>
           </a:xfrm>
           <a:prstGeom prst="rect">
             <a:avLst/>
@@ -5535,7 +5548,7 @@
         <p:spPr/>
         <p:txBody>
           <a:bodyPr>
-            <a:normAutofit lnSpcReduction="10000"/>
+            <a:normAutofit fontScale="92500" lnSpcReduction="10000"/>
           </a:bodyPr>
           <a:lstStyle/>
           <a:p>
@@ -5623,7 +5636,7 @@
             </a:r>
             <a:r>
               <a:rPr lang="ru-RU" dirty="0"/>
-              <a:t>длина ключа</a:t>
+              <a:t>длина ключа. Возможна атака через автокорреляционный и статистический методы.</a:t>
             </a:r>
           </a:p>
           <a:p>
@@ -6583,7 +6596,7 @@
         </p:spPr>
         <p:txBody>
           <a:bodyPr>
-            <a:normAutofit fontScale="92500"/>
+            <a:normAutofit fontScale="92500" lnSpcReduction="10000"/>
           </a:bodyPr>
           <a:lstStyle/>
           <a:p>
@@ -6686,7 +6699,7 @@
             </a:r>
             <a:r>
               <a:rPr lang="ru-RU" dirty="0"/>
-              <a:t>размер блока</a:t>
+              <a:t>размер блока. Возможна атака на основе знания исходного текста.</a:t>
             </a:r>
           </a:p>
           <a:p>
@@ -8484,7 +8497,7 @@
             </a:r>
             <a:r>
               <a:rPr lang="ru-RU" dirty="0"/>
-              <a:t>мощность алфавита</a:t>
+              <a:t>длина открытого текста</a:t>
             </a:r>
           </a:p>
           <a:p>
@@ -11696,6 +11709,14 @@
             <a:r>
               <a:rPr lang="ru-RU" dirty="0"/>
               <a:t>мощность алфавита</a:t>
+            </a:r>
+            <a:r>
+              <a:rPr lang="en-US" dirty="0"/>
+              <a:t>. </a:t>
+            </a:r>
+            <a:r>
+              <a:rPr lang="ru-RU" dirty="0"/>
+              <a:t>Возможна атака методом частотного анализа.</a:t>
             </a:r>
           </a:p>
         </p:txBody>
